--- a/02 Osnove Informacione Bezbednosti/02 Prezentacije/PPTX/06_Detekcija_incident_i_ranjivosti.pptx
+++ b/02 Osnove Informacione Bezbednosti/02 Prezentacije/PPTX/06_Detekcija_incident_i_ranjivosti.pptx
@@ -7590,7 +7590,7 @@
                 <a:ea typeface="Aptos Display"/>
                 <a:cs typeface="Aptos Display"/>
               </a:rPr>
-              <a:t>Triage додаје контекст пре отварања инцидента</a:t>
+              <a:t>Правило детекције додаје контекст сигналу</a:t>
             </a:r>
           </a:p>
         </p:txBody>
@@ -7651,7 +7651,7 @@
                 <a:ea typeface="Aptos"/>
                 <a:cs typeface="Aptos"/>
               </a:rPr>
-              <a:t>Triage обједињује релевантне сигнале и процењује контекст пре отварања инцидента.</a:t>
+              <a:t>Правило броји неуспеле пријаве по субјекту и адреси унутар временског прозора.</a:t>
             </a:r>
           </a:p>
         </p:txBody>
@@ -7673,7 +7673,7 @@
         <p:spPr>
           <a:xfrm xmlns:a="http://schemas.openxmlformats.org/drawingml/2006/main">
             <a:off x="666750" y="2095500"/>
-            <a:ext cx="6858000" cy="2152650"/>
+            <a:ext cx="6858000" cy="2482350"/>
           </a:xfrm>
           <a:prstGeom xmlns:a="http://schemas.openxmlformats.org/drawingml/2006/main" prst="roundRect">
             <a:avLst>
@@ -7855,7 +7855,7 @@
           <a:p xmlns:a="http://schemas.openxmlformats.org/drawingml/2006/main">
             <a:pPr algn="r">
               <a:lnSpc>
-                <a:spcPct val="100000"/>
+                <a:spcPts val="1300"/>
               </a:lnSpc>
               <a:buNone/>
               <a:defRPr sz="975" b="0">
@@ -7882,7 +7882,7 @@
           <a:p xmlns:a="http://schemas.openxmlformats.org/drawingml/2006/main">
             <a:pPr algn="r">
               <a:lnSpc>
-                <a:spcPct val="100000"/>
+                <a:spcPts val="1300"/>
               </a:lnSpc>
               <a:buNone/>
               <a:defRPr sz="975" b="0">
@@ -7909,7 +7909,7 @@
           <a:p xmlns:a="http://schemas.openxmlformats.org/drawingml/2006/main">
             <a:pPr algn="r">
               <a:lnSpc>
-                <a:spcPct val="100000"/>
+                <a:spcPts val="1300"/>
               </a:lnSpc>
               <a:buNone/>
               <a:defRPr sz="975" b="0">
@@ -7936,7 +7936,7 @@
           <a:p xmlns:a="http://schemas.openxmlformats.org/drawingml/2006/main">
             <a:pPr algn="r">
               <a:lnSpc>
-                <a:spcPct val="100000"/>
+                <a:spcPts val="1300"/>
               </a:lnSpc>
               <a:buNone/>
               <a:defRPr sz="975" b="0">
@@ -7963,7 +7963,7 @@
           <a:p xmlns:a="http://schemas.openxmlformats.org/drawingml/2006/main">
             <a:pPr algn="r">
               <a:lnSpc>
-                <a:spcPct val="100000"/>
+                <a:spcPts val="1300"/>
               </a:lnSpc>
               <a:buNone/>
               <a:defRPr sz="975" b="0">
@@ -7990,7 +7990,7 @@
           <a:p xmlns:a="http://schemas.openxmlformats.org/drawingml/2006/main">
             <a:pPr algn="r">
               <a:lnSpc>
-                <a:spcPct val="100000"/>
+                <a:spcPts val="1300"/>
               </a:lnSpc>
               <a:buNone/>
               <a:defRPr sz="975" b="0">
@@ -8017,7 +8017,7 @@
           <a:p xmlns:a="http://schemas.openxmlformats.org/drawingml/2006/main">
             <a:pPr algn="r">
               <a:lnSpc>
-                <a:spcPct val="100000"/>
+                <a:spcPts val="1300"/>
               </a:lnSpc>
               <a:buNone/>
               <a:defRPr sz="975" b="0">
@@ -8044,7 +8044,7 @@
           <a:p xmlns:a="http://schemas.openxmlformats.org/drawingml/2006/main">
             <a:pPr algn="r">
               <a:lnSpc>
-                <a:spcPct val="100000"/>
+                <a:spcPts val="1300"/>
               </a:lnSpc>
               <a:buNone/>
               <a:defRPr sz="975" b="0">
@@ -8071,7 +8071,7 @@
           <a:p xmlns:a="http://schemas.openxmlformats.org/drawingml/2006/main">
             <a:pPr algn="r">
               <a:lnSpc>
-                <a:spcPct val="100000"/>
+                <a:spcPts val="1300"/>
               </a:lnSpc>
               <a:buNone/>
               <a:defRPr sz="975" b="0">
@@ -8095,46 +8095,15 @@
               <a:t>9</a:t>
             </a:r>
           </a:p>
-        </p:txBody>
-      </p:sp>
-      <p:sp>
-        <p:nvSpPr>
-          <p:cNvPr id="12" name="Rectangle 11">
-            <a:extLst xmlns:a="http://schemas.openxmlformats.org/drawingml/2006/main">
-              <a:ext uri="{FF2B5EF4-FFF2-40B4-BE49-F238E27FC236}">
-                <a16:creationId xmlns:a16="http://schemas.microsoft.com/office/drawing/2014/main" id="{227AA43F-CF97-47F6-A0FD-CACEC1B8BDF2}"/>
-              </a:ext>
-            </a:extLst>
-          </p:cNvPr>
-          <p:cNvSpPr>
-            <a:spLocks xmlns:a="http://schemas.openxmlformats.org/drawingml/2006/main" noGrp="1"/>
-          </p:cNvSpPr>
-          <p:nvPr/>
-        </p:nvSpPr>
-        <p:spPr>
-          <a:xfrm xmlns:a="http://schemas.openxmlformats.org/drawingml/2006/main">
-            <a:off x="1200150" y="2571750"/>
-            <a:ext cx="6153150" cy="3028950"/>
-          </a:xfrm>
-          <a:prstGeom xmlns:a="http://schemas.openxmlformats.org/drawingml/2006/main" prst="rect">
-            <a:avLst/>
-          </a:prstGeom>
-          <a:noFill xmlns:a="http://schemas.openxmlformats.org/drawingml/2006/main"/>
-          <a:ln xmlns:a="http://schemas.openxmlformats.org/drawingml/2006/main" w="0">
-            <a:noFill/>
-          </a:ln>
-        </p:spPr>
-        <p:txBody>
-          <a:bodyPr xmlns:a="http://schemas.openxmlformats.org/drawingml/2006/main" wrap="square" lIns="0" tIns="0" rIns="0" bIns="0" anchor="t">
-            <a:normAutofit/>
-          </a:bodyPr>
-          <a:lstStyle xmlns:a="http://schemas.openxmlformats.org/drawingml/2006/main"/>
-          <a:p xmlns:a="http://schemas.openxmlformats.org/drawingml/2006/main">
-            <a:pPr>
-              <a:buNone/>
-              <a:defRPr sz="1050">
-                <a:solidFill>
-                  <a:srgbClr val="263044"/>
+          <a:p xmlns:a="http://schemas.openxmlformats.org/drawingml/2006/main">
+            <a:pPr algn="r">
+              <a:lnSpc>
+                <a:spcPts val="1300"/>
+              </a:lnSpc>
+              <a:buNone/>
+              <a:defRPr sz="975" b="0">
+                <a:solidFill>
+                  <a:srgbClr val="8792A6"/>
                 </a:solidFill>
                 <a:latin typeface="Consolas"/>
                 <a:ea typeface="Consolas"/>
@@ -8142,113 +8111,26 @@
               </a:defRPr>
             </a:pPr>
             <a:r>
-              <a:rPr b="1">
-                <a:solidFill>
-                  <a:srgbClr val="0969C3"/>
-                </a:solidFill>
-              </a:rPr>
-              <a:t>public</a:t>
-            </a:r>
-            <a:r>
-              <a:rPr b="0">
-                <a:solidFill>
-                  <a:srgbClr val="263044"/>
-                </a:solidFill>
-              </a:rPr>
-              <a:t> </a:t>
-            </a:r>
-            <a:r>
-              <a:rPr b="0">
-                <a:solidFill>
-                  <a:srgbClr val="7651D4"/>
-                </a:solidFill>
-              </a:rPr>
-              <a:t>TriageResult</a:t>
-            </a:r>
-            <a:r>
-              <a:rPr b="0">
-                <a:solidFill>
-                  <a:srgbClr val="263044"/>
-                </a:solidFill>
-              </a:rPr>
-              <a:t> </a:t>
-            </a:r>
-            <a:r>
-              <a:rPr b="0">
-                <a:solidFill>
-                  <a:srgbClr val="7651D4"/>
-                </a:solidFill>
-              </a:rPr>
-              <a:t>Triage</a:t>
-            </a:r>
-            <a:r>
-              <a:rPr b="0">
-                <a:solidFill>
-                  <a:srgbClr val="263044"/>
-                </a:solidFill>
-              </a:rPr>
-              <a:t>(</a:t>
-            </a:r>
-            <a:r>
-              <a:rPr b="0">
-                <a:solidFill>
-                  <a:srgbClr val="7651D4"/>
-                </a:solidFill>
-              </a:rPr>
-              <a:t>Alert</a:t>
-            </a:r>
-            <a:r>
-              <a:rPr b="0">
-                <a:solidFill>
-                  <a:srgbClr val="263044"/>
-                </a:solidFill>
-              </a:rPr>
-              <a:t> alert, </a:t>
-            </a:r>
-            <a:r>
-              <a:rPr b="0">
-                <a:solidFill>
-                  <a:srgbClr val="7651D4"/>
-                </a:solidFill>
-              </a:rPr>
-              <a:t>Asset</a:t>
-            </a:r>
-            <a:r>
-              <a:rPr b="0">
-                <a:solidFill>
-                  <a:srgbClr val="263044"/>
-                </a:solidFill>
-              </a:rPr>
-              <a:t> asset)</a:t>
-            </a:r>
-          </a:p>
-          <a:p xmlns:a="http://schemas.openxmlformats.org/drawingml/2006/main">
-            <a:pPr>
-              <a:buNone/>
-              <a:defRPr sz="1050">
-                <a:solidFill>
-                  <a:srgbClr val="263044"/>
+              <a:rPr sz="975" b="0">
+                <a:solidFill>
+                  <a:srgbClr val="8792A6"/>
                 </a:solidFill>
                 <a:latin typeface="Consolas"/>
                 <a:ea typeface="Consolas"/>
                 <a:cs typeface="Consolas"/>
-              </a:defRPr>
-            </a:pPr>
-            <a:r>
-              <a:rPr b="0">
-                <a:solidFill>
-                  <a:srgbClr val="263044"/>
-                </a:solidFill>
-              </a:rPr>
-              <a:t>{</a:t>
-            </a:r>
-          </a:p>
-          <a:p xmlns:a="http://schemas.openxmlformats.org/drawingml/2006/main">
-            <a:pPr>
-              <a:buNone/>
-              <a:defRPr sz="1050">
-                <a:solidFill>
-                  <a:srgbClr val="263044"/>
+              </a:rPr>
+              <a:t>10</a:t>
+            </a:r>
+          </a:p>
+          <a:p xmlns:a="http://schemas.openxmlformats.org/drawingml/2006/main">
+            <a:pPr algn="r">
+              <a:lnSpc>
+                <a:spcPts val="1300"/>
+              </a:lnSpc>
+              <a:buNone/>
+              <a:defRPr sz="975" b="0">
+                <a:solidFill>
+                  <a:srgbClr val="8792A6"/>
                 </a:solidFill>
                 <a:latin typeface="Consolas"/>
                 <a:ea typeface="Consolas"/>
@@ -8256,133 +8138,56 @@
               </a:defRPr>
             </a:pPr>
             <a:r>
-              <a:rPr b="0">
-                <a:solidFill>
-                  <a:srgbClr val="263044"/>
-                </a:solidFill>
-              </a:rPr>
-              <a:t>    </a:t>
-            </a:r>
-            <a:r>
-              <a:rPr b="1">
-                <a:solidFill>
-                  <a:srgbClr val="0969C3"/>
-                </a:solidFill>
-              </a:rPr>
-              <a:t>if</a:t>
-            </a:r>
-            <a:r>
-              <a:rPr b="0">
-                <a:solidFill>
-                  <a:srgbClr val="263044"/>
-                </a:solidFill>
-              </a:rPr>
-              <a:t> (alerts.</a:t>
-            </a:r>
-            <a:r>
-              <a:rPr b="0">
-                <a:solidFill>
-                  <a:srgbClr val="7651D4"/>
-                </a:solidFill>
-              </a:rPr>
-              <a:t>IsDuplicate</a:t>
-            </a:r>
-            <a:r>
-              <a:rPr b="0">
-                <a:solidFill>
-                  <a:srgbClr val="263044"/>
-                </a:solidFill>
-              </a:rPr>
-              <a:t>(alert.</a:t>
-            </a:r>
-            <a:r>
-              <a:rPr b="0">
-                <a:solidFill>
-                  <a:srgbClr val="7651D4"/>
-                </a:solidFill>
-              </a:rPr>
-              <a:t>Fingerprint</a:t>
-            </a:r>
-            <a:r>
-              <a:rPr b="0">
-                <a:solidFill>
-                  <a:srgbClr val="263044"/>
-                </a:solidFill>
-              </a:rPr>
-              <a:t>))</a:t>
-            </a:r>
-          </a:p>
-          <a:p xmlns:a="http://schemas.openxmlformats.org/drawingml/2006/main">
-            <a:pPr>
-              <a:buNone/>
-              <a:defRPr sz="1050">
-                <a:solidFill>
-                  <a:srgbClr val="263044"/>
+              <a:rPr sz="975" b="0">
+                <a:solidFill>
+                  <a:srgbClr val="8792A6"/>
                 </a:solidFill>
                 <a:latin typeface="Consolas"/>
                 <a:ea typeface="Consolas"/>
                 <a:cs typeface="Consolas"/>
-              </a:defRPr>
-            </a:pPr>
-            <a:r>
-              <a:rPr b="0">
-                <a:solidFill>
-                  <a:srgbClr val="263044"/>
-                </a:solidFill>
-              </a:rPr>
-              <a:t>        </a:t>
-            </a:r>
-            <a:r>
-              <a:rPr b="1">
-                <a:solidFill>
-                  <a:srgbClr val="0969C3"/>
-                </a:solidFill>
-              </a:rPr>
-              <a:t>return</a:t>
-            </a:r>
-            <a:r>
-              <a:rPr b="0">
-                <a:solidFill>
-                  <a:srgbClr val="263044"/>
-                </a:solidFill>
-              </a:rPr>
-              <a:t> </a:t>
-            </a:r>
-            <a:r>
-              <a:rPr b="0">
-                <a:solidFill>
-                  <a:srgbClr val="7651D4"/>
-                </a:solidFill>
-              </a:rPr>
-              <a:t>TriageResult</a:t>
-            </a:r>
-            <a:r>
-              <a:rPr b="0">
-                <a:solidFill>
-                  <a:srgbClr val="263044"/>
-                </a:solidFill>
-              </a:rPr>
-              <a:t>.</a:t>
-            </a:r>
-            <a:r>
-              <a:rPr b="0">
-                <a:solidFill>
-                  <a:srgbClr val="7651D4"/>
-                </a:solidFill>
-              </a:rPr>
-              <a:t>MergeWithExisting</a:t>
-            </a:r>
-            <a:r>
-              <a:rPr b="0">
-                <a:solidFill>
-                  <a:srgbClr val="263044"/>
-                </a:solidFill>
-              </a:rPr>
-              <a:t>();</a:t>
-            </a:r>
-          </a:p>
+              </a:rPr>
+              <a:t>11</a:t>
+            </a:r>
+          </a:p>
+        </p:txBody>
+      </p:sp>
+      <p:sp>
+        <p:nvSpPr>
+          <p:cNvPr id="12" name="Rectangle 11">
+            <a:extLst xmlns:a="http://schemas.openxmlformats.org/drawingml/2006/main">
+              <a:ext uri="{FF2B5EF4-FFF2-40B4-BE49-F238E27FC236}">
+                <a16:creationId xmlns:a16="http://schemas.microsoft.com/office/drawing/2014/main" id="{227AA43F-CF97-47F6-A0FD-CACEC1B8BDF2}"/>
+              </a:ext>
+            </a:extLst>
+          </p:cNvPr>
+          <p:cNvSpPr>
+            <a:spLocks xmlns:a="http://schemas.openxmlformats.org/drawingml/2006/main" noGrp="1"/>
+          </p:cNvSpPr>
+          <p:nvPr/>
+        </p:nvSpPr>
+        <p:spPr>
+          <a:xfrm xmlns:a="http://schemas.openxmlformats.org/drawingml/2006/main">
+            <a:off x="1200150" y="2571750"/>
+            <a:ext cx="6153150" cy="3028950"/>
+          </a:xfrm>
+          <a:prstGeom xmlns:a="http://schemas.openxmlformats.org/drawingml/2006/main" prst="rect">
+            <a:avLst/>
+          </a:prstGeom>
+          <a:noFill xmlns:a="http://schemas.openxmlformats.org/drawingml/2006/main"/>
+          <a:ln xmlns:a="http://schemas.openxmlformats.org/drawingml/2006/main" w="0">
+            <a:noFill/>
+          </a:ln>
+        </p:spPr>
+        <p:txBody>
+          <a:bodyPr xmlns:a="http://schemas.openxmlformats.org/drawingml/2006/main" wrap="square" lIns="0" tIns="0" rIns="0" bIns="0" anchor="t">
+            <a:normAutofit/>
+          </a:bodyPr>
+          <a:lstStyle xmlns:a="http://schemas.openxmlformats.org/drawingml/2006/main"/>
           <a:p xmlns:a="http://schemas.openxmlformats.org/drawingml/2006/main">
             <a:pPr>
+              <a:lnSpc>
+                <a:spcPts val="1300"/>
+              </a:lnSpc>
               <a:buNone/>
               <a:defRPr sz="1050">
                 <a:solidFill>
@@ -8394,28 +8199,36 @@
               </a:defRPr>
             </a:pPr>
             <a:r>
+              <a:rPr b="1">
+                <a:solidFill>
+                  <a:srgbClr val="0969C3"/>
+                </a:solidFill>
+              </a:rPr>
+              <a:t>public</a:t>
+            </a:r>
+            <a:r>
               <a:rPr b="0">
                 <a:solidFill>
                   <a:srgbClr val="263044"/>
                 </a:solidFill>
               </a:rPr>
-              <a:t>    </a:t>
-            </a:r>
-            <a:r>
-              <a:rPr b="1">
-                <a:solidFill>
-                  <a:srgbClr val="0969C3"/>
-                </a:solidFill>
-              </a:rPr>
-              <a:t>var</a:t>
+              <a:t> </a:t>
             </a:r>
             <a:r>
               <a:rPr b="0">
                 <a:solidFill>
+                  <a:srgbClr val="7651D4"/>
+                </a:solidFill>
+              </a:rPr>
+              <a:t>IReadOnlyList</a:t>
+            </a:r>
+            <a:r>
+              <a:rPr b="0">
+                <a:solidFill>
                   <a:srgbClr val="263044"/>
                 </a:solidFill>
               </a:rPr>
-              <a:t> severity = risk.</a:t>
+              <a:t>&lt;</a:t>
             </a:r>
             <a:r>
               <a:rPr b="0">
@@ -8423,7 +8236,7 @@
                   <a:srgbClr val="7651D4"/>
                 </a:solidFill>
               </a:rPr>
-              <a:t>Score</a:t>
+              <a:t>SecuritySignal</a:t>
             </a:r>
             <a:r>
               <a:rPr b="0">
@@ -8431,7 +8244,7 @@
                   <a:srgbClr val="263044"/>
                 </a:solidFill>
               </a:rPr>
-              <a:t>(alert.</a:t>
+              <a:t>&gt; </a:t>
             </a:r>
             <a:r>
               <a:rPr b="0">
@@ -8439,7 +8252,7 @@
                   <a:srgbClr val="7651D4"/>
                 </a:solidFill>
               </a:rPr>
-              <a:t>Signal</a:t>
+              <a:t>Detect</a:t>
             </a:r>
             <a:r>
               <a:rPr b="0">
@@ -8447,27 +8260,14 @@
                   <a:srgbClr val="263044"/>
                 </a:solidFill>
               </a:rPr>
-              <a:t>, asset.</a:t>
-            </a:r>
-            <a:r>
-              <a:rPr b="0">
-                <a:solidFill>
-                  <a:srgbClr val="7651D4"/>
-                </a:solidFill>
-              </a:rPr>
-              <a:t>Criticality</a:t>
-            </a:r>
-            <a:r>
-              <a:rPr b="0">
-                <a:solidFill>
-                  <a:srgbClr val="263044"/>
-                </a:solidFill>
-              </a:rPr>
-              <a:t>);</a:t>
+              <a:t>(</a:t>
             </a:r>
           </a:p>
           <a:p xmlns:a="http://schemas.openxmlformats.org/drawingml/2006/main">
             <a:pPr>
+              <a:lnSpc>
+                <a:spcPts val="1300"/>
+              </a:lnSpc>
               <a:buNone/>
               <a:defRPr sz="1050">
                 <a:solidFill>
@@ -8487,20 +8287,20 @@
               <a:t>    </a:t>
             </a:r>
             <a:r>
-              <a:rPr b="1">
-                <a:solidFill>
-                  <a:srgbClr val="0969C3"/>
-                </a:solidFill>
-              </a:rPr>
-              <a:t>if</a:t>
-            </a:r>
-            <a:r>
               <a:rPr b="0">
                 <a:solidFill>
+                  <a:srgbClr val="7651D4"/>
+                </a:solidFill>
+              </a:rPr>
+              <a:t>IReadOnlyCollection</a:t>
+            </a:r>
+            <a:r>
+              <a:rPr b="0">
+                <a:solidFill>
                   <a:srgbClr val="263044"/>
                 </a:solidFill>
               </a:rPr>
-              <a:t> (severity &lt; </a:t>
+              <a:t>&lt;</a:t>
             </a:r>
             <a:r>
               <a:rPr b="0">
@@ -8508,7 +8308,7 @@
                   <a:srgbClr val="7651D4"/>
                 </a:solidFill>
               </a:rPr>
-              <a:t>Threshold</a:t>
+              <a:t>LoginAttempt</a:t>
             </a:r>
             <a:r>
               <a:rPr b="0">
@@ -8516,7 +8316,7 @@
                   <a:srgbClr val="263044"/>
                 </a:solidFill>
               </a:rPr>
-              <a:t>.</a:t>
+              <a:t>&gt; attempts, </a:t>
             </a:r>
             <a:r>
               <a:rPr b="0">
@@ -8524,7 +8324,7 @@
                   <a:srgbClr val="7651D4"/>
                 </a:solidFill>
               </a:rPr>
-              <a:t>Medium</a:t>
+              <a:t>DateTimeOffset</a:t>
             </a:r>
             <a:r>
               <a:rPr b="0">
@@ -8532,11 +8332,14 @@
                   <a:srgbClr val="263044"/>
                 </a:solidFill>
               </a:rPr>
-              <a:t>)</a:t>
+              <a:t> now)</a:t>
             </a:r>
           </a:p>
           <a:p xmlns:a="http://schemas.openxmlformats.org/drawingml/2006/main">
             <a:pPr>
+              <a:lnSpc>
+                <a:spcPts val="1300"/>
+              </a:lnSpc>
               <a:buNone/>
               <a:defRPr sz="1050">
                 <a:solidFill>
@@ -8553,75 +8356,14 @@
                   <a:srgbClr val="263044"/>
                 </a:solidFill>
               </a:rPr>
-              <a:t>        </a:t>
-            </a:r>
-            <a:r>
-              <a:rPr b="1">
-                <a:solidFill>
-                  <a:srgbClr val="0969C3"/>
-                </a:solidFill>
-              </a:rPr>
-              <a:t>return</a:t>
-            </a:r>
-            <a:r>
-              <a:rPr b="0">
-                <a:solidFill>
-                  <a:srgbClr val="263044"/>
-                </a:solidFill>
-              </a:rPr>
-              <a:t> </a:t>
-            </a:r>
-            <a:r>
-              <a:rPr b="0">
-                <a:solidFill>
-                  <a:srgbClr val="7651D4"/>
-                </a:solidFill>
-              </a:rPr>
-              <a:t>TriageResult</a:t>
-            </a:r>
-            <a:r>
-              <a:rPr b="0">
-                <a:solidFill>
-                  <a:srgbClr val="263044"/>
-                </a:solidFill>
-              </a:rPr>
-              <a:t>.</a:t>
-            </a:r>
-            <a:r>
-              <a:rPr b="0">
-                <a:solidFill>
-                  <a:srgbClr val="7651D4"/>
-                </a:solidFill>
-              </a:rPr>
-              <a:t>Close</a:t>
-            </a:r>
-            <a:r>
-              <a:rPr b="0">
-                <a:solidFill>
-                  <a:srgbClr val="263044"/>
-                </a:solidFill>
-              </a:rPr>
-              <a:t>(</a:t>
-            </a:r>
-            <a:r>
-              <a:rPr b="0">
-                <a:solidFill>
-                  <a:srgbClr val="B45309"/>
-                </a:solidFill>
-              </a:rPr>
-              <a:t>"below_threshold"</a:t>
-            </a:r>
-            <a:r>
-              <a:rPr b="0">
-                <a:solidFill>
-                  <a:srgbClr val="263044"/>
-                </a:solidFill>
-              </a:rPr>
-              <a:t>);</a:t>
+              <a:t>{</a:t>
             </a:r>
           </a:p>
           <a:p xmlns:a="http://schemas.openxmlformats.org/drawingml/2006/main">
             <a:pPr>
+              <a:lnSpc>
+                <a:spcPts val="1300"/>
+              </a:lnSpc>
               <a:buNone/>
               <a:defRPr sz="1050">
                 <a:solidFill>
@@ -8654,15 +8396,39 @@
                   <a:srgbClr val="263044"/>
                 </a:solidFill>
               </a:rPr>
-              <a:t> incidents.</a:t>
-            </a:r>
+              <a:t> attempts</a:t>
+            </a:r>
+          </a:p>
+          <a:p xmlns:a="http://schemas.openxmlformats.org/drawingml/2006/main">
+            <a:pPr>
+              <a:lnSpc>
+                <a:spcPts val="1300"/>
+              </a:lnSpc>
+              <a:buNone/>
+              <a:defRPr sz="1050">
+                <a:solidFill>
+                  <a:srgbClr val="263044"/>
+                </a:solidFill>
+                <a:latin typeface="Consolas"/>
+                <a:ea typeface="Consolas"/>
+                <a:cs typeface="Consolas"/>
+              </a:defRPr>
+            </a:pPr>
             <a:r>
               <a:rPr b="0">
                 <a:solidFill>
+                  <a:srgbClr val="263044"/>
+                </a:solidFill>
+              </a:rPr>
+              <a:t>        .</a:t>
+            </a:r>
+            <a:r>
+              <a:rPr b="0">
+                <a:solidFill>
                   <a:srgbClr val="7651D4"/>
                 </a:solidFill>
               </a:rPr>
-              <a:t>Open</a:t>
+              <a:t>Where</a:t>
             </a:r>
             <a:r>
               <a:rPr b="0">
@@ -8670,11 +8436,406 @@
                   <a:srgbClr val="263044"/>
                 </a:solidFill>
               </a:rPr>
-              <a:t>(alert, asset, severity);</a:t>
+              <a:t>(attempt =&gt; !attempt.</a:t>
+            </a:r>
+            <a:r>
+              <a:rPr b="0">
+                <a:solidFill>
+                  <a:srgbClr val="7651D4"/>
+                </a:solidFill>
+              </a:rPr>
+              <a:t>Succeeded</a:t>
+            </a:r>
+            <a:r>
+              <a:rPr b="0">
+                <a:solidFill>
+                  <a:srgbClr val="263044"/>
+                </a:solidFill>
+              </a:rPr>
+              <a:t> &amp;&amp; </a:t>
+            </a:r>
+            <a:r>
+              <a:rPr b="0">
+                <a:solidFill>
+                  <a:srgbClr val="7651D4"/>
+                </a:solidFill>
+              </a:rPr>
+              <a:t>IsInsideWindow</a:t>
+            </a:r>
+            <a:r>
+              <a:rPr b="0">
+                <a:solidFill>
+                  <a:srgbClr val="263044"/>
+                </a:solidFill>
+              </a:rPr>
+              <a:t>(attempt, now))</a:t>
             </a:r>
           </a:p>
           <a:p xmlns:a="http://schemas.openxmlformats.org/drawingml/2006/main">
             <a:pPr>
+              <a:lnSpc>
+                <a:spcPts val="1300"/>
+              </a:lnSpc>
+              <a:buNone/>
+              <a:defRPr sz="1050">
+                <a:solidFill>
+                  <a:srgbClr val="263044"/>
+                </a:solidFill>
+                <a:latin typeface="Consolas"/>
+                <a:ea typeface="Consolas"/>
+                <a:cs typeface="Consolas"/>
+              </a:defRPr>
+            </a:pPr>
+            <a:r>
+              <a:rPr b="0">
+                <a:solidFill>
+                  <a:srgbClr val="263044"/>
+                </a:solidFill>
+              </a:rPr>
+              <a:t>        .</a:t>
+            </a:r>
+            <a:r>
+              <a:rPr b="0">
+                <a:solidFill>
+                  <a:srgbClr val="7651D4"/>
+                </a:solidFill>
+              </a:rPr>
+              <a:t>GroupBy</a:t>
+            </a:r>
+            <a:r>
+              <a:rPr b="0">
+                <a:solidFill>
+                  <a:srgbClr val="263044"/>
+                </a:solidFill>
+              </a:rPr>
+              <a:t>(attempt =&gt; (attempt.</a:t>
+            </a:r>
+            <a:r>
+              <a:rPr b="0">
+                <a:solidFill>
+                  <a:srgbClr val="7651D4"/>
+                </a:solidFill>
+              </a:rPr>
+              <a:t>SubjectId</a:t>
+            </a:r>
+            <a:r>
+              <a:rPr b="0">
+                <a:solidFill>
+                  <a:srgbClr val="263044"/>
+                </a:solidFill>
+              </a:rPr>
+              <a:t>, attempt.</a:t>
+            </a:r>
+            <a:r>
+              <a:rPr b="0">
+                <a:solidFill>
+                  <a:srgbClr val="7651D4"/>
+                </a:solidFill>
+              </a:rPr>
+              <a:t>SourceIp</a:t>
+            </a:r>
+            <a:r>
+              <a:rPr b="0">
+                <a:solidFill>
+                  <a:srgbClr val="263044"/>
+                </a:solidFill>
+              </a:rPr>
+              <a:t>))</a:t>
+            </a:r>
+          </a:p>
+          <a:p xmlns:a="http://schemas.openxmlformats.org/drawingml/2006/main">
+            <a:pPr>
+              <a:lnSpc>
+                <a:spcPts val="1300"/>
+              </a:lnSpc>
+              <a:buNone/>
+              <a:defRPr sz="1050">
+                <a:solidFill>
+                  <a:srgbClr val="263044"/>
+                </a:solidFill>
+                <a:latin typeface="Consolas"/>
+                <a:ea typeface="Consolas"/>
+                <a:cs typeface="Consolas"/>
+              </a:defRPr>
+            </a:pPr>
+            <a:r>
+              <a:rPr b="0">
+                <a:solidFill>
+                  <a:srgbClr val="263044"/>
+                </a:solidFill>
+              </a:rPr>
+              <a:t>        .</a:t>
+            </a:r>
+            <a:r>
+              <a:rPr b="0">
+                <a:solidFill>
+                  <a:srgbClr val="7651D4"/>
+                </a:solidFill>
+              </a:rPr>
+              <a:t>Where</a:t>
+            </a:r>
+            <a:r>
+              <a:rPr b="0">
+                <a:solidFill>
+                  <a:srgbClr val="263044"/>
+                </a:solidFill>
+              </a:rPr>
+              <a:t>(group =&gt; group.</a:t>
+            </a:r>
+            <a:r>
+              <a:rPr b="0">
+                <a:solidFill>
+                  <a:srgbClr val="7651D4"/>
+                </a:solidFill>
+              </a:rPr>
+              <a:t>Count</a:t>
+            </a:r>
+            <a:r>
+              <a:rPr b="0">
+                <a:solidFill>
+                  <a:srgbClr val="263044"/>
+                </a:solidFill>
+              </a:rPr>
+              <a:t>() &gt;= _threshold)</a:t>
+            </a:r>
+          </a:p>
+          <a:p xmlns:a="http://schemas.openxmlformats.org/drawingml/2006/main">
+            <a:pPr>
+              <a:lnSpc>
+                <a:spcPts val="1300"/>
+              </a:lnSpc>
+              <a:buNone/>
+              <a:defRPr sz="1050">
+                <a:solidFill>
+                  <a:srgbClr val="263044"/>
+                </a:solidFill>
+                <a:latin typeface="Consolas"/>
+                <a:ea typeface="Consolas"/>
+                <a:cs typeface="Consolas"/>
+              </a:defRPr>
+            </a:pPr>
+            <a:r>
+              <a:rPr b="0">
+                <a:solidFill>
+                  <a:srgbClr val="263044"/>
+                </a:solidFill>
+              </a:rPr>
+              <a:t>        .</a:t>
+            </a:r>
+            <a:r>
+              <a:rPr b="0">
+                <a:solidFill>
+                  <a:srgbClr val="7651D4"/>
+                </a:solidFill>
+              </a:rPr>
+              <a:t>Select</a:t>
+            </a:r>
+            <a:r>
+              <a:rPr b="0">
+                <a:solidFill>
+                  <a:srgbClr val="263044"/>
+                </a:solidFill>
+              </a:rPr>
+              <a:t>(group =&gt; </a:t>
+            </a:r>
+            <a:r>
+              <a:rPr b="1">
+                <a:solidFill>
+                  <a:srgbClr val="0969C3"/>
+                </a:solidFill>
+              </a:rPr>
+              <a:t>new</a:t>
+            </a:r>
+            <a:r>
+              <a:rPr b="0">
+                <a:solidFill>
+                  <a:srgbClr val="263044"/>
+                </a:solidFill>
+              </a:rPr>
+              <a:t> </a:t>
+            </a:r>
+            <a:r>
+              <a:rPr b="0">
+                <a:solidFill>
+                  <a:srgbClr val="7651D4"/>
+                </a:solidFill>
+              </a:rPr>
+              <a:t>SecuritySignal</a:t>
+            </a:r>
+            <a:r>
+              <a:rPr b="0">
+                <a:solidFill>
+                  <a:srgbClr val="263044"/>
+                </a:solidFill>
+              </a:rPr>
+              <a:t>(</a:t>
+            </a:r>
+          </a:p>
+          <a:p xmlns:a="http://schemas.openxmlformats.org/drawingml/2006/main">
+            <a:pPr>
+              <a:lnSpc>
+                <a:spcPts val="1300"/>
+              </a:lnSpc>
+              <a:buNone/>
+              <a:defRPr sz="1050">
+                <a:solidFill>
+                  <a:srgbClr val="263044"/>
+                </a:solidFill>
+                <a:latin typeface="Consolas"/>
+                <a:ea typeface="Consolas"/>
+                <a:cs typeface="Consolas"/>
+              </a:defRPr>
+            </a:pPr>
+            <a:r>
+              <a:rPr b="0">
+                <a:solidFill>
+                  <a:srgbClr val="263044"/>
+                </a:solidFill>
+              </a:rPr>
+              <a:t>            </a:t>
+            </a:r>
+            <a:r>
+              <a:rPr b="0">
+                <a:solidFill>
+                  <a:srgbClr val="7651D4"/>
+                </a:solidFill>
+              </a:rPr>
+              <a:t>Name</a:t>
+            </a:r>
+            <a:r>
+              <a:rPr b="0">
+                <a:solidFill>
+                  <a:srgbClr val="263044"/>
+                </a:solidFill>
+              </a:rPr>
+              <a:t>, group.</a:t>
+            </a:r>
+            <a:r>
+              <a:rPr b="0">
+                <a:solidFill>
+                  <a:srgbClr val="7651D4"/>
+                </a:solidFill>
+              </a:rPr>
+              <a:t>Key</a:t>
+            </a:r>
+            <a:r>
+              <a:rPr b="0">
+                <a:solidFill>
+                  <a:srgbClr val="263044"/>
+                </a:solidFill>
+              </a:rPr>
+              <a:t>.</a:t>
+            </a:r>
+            <a:r>
+              <a:rPr b="0">
+                <a:solidFill>
+                  <a:srgbClr val="7651D4"/>
+                </a:solidFill>
+              </a:rPr>
+              <a:t>SubjectId</a:t>
+            </a:r>
+            <a:r>
+              <a:rPr b="0">
+                <a:solidFill>
+                  <a:srgbClr val="263044"/>
+                </a:solidFill>
+              </a:rPr>
+              <a:t>, group.</a:t>
+            </a:r>
+            <a:r>
+              <a:rPr b="0">
+                <a:solidFill>
+                  <a:srgbClr val="7651D4"/>
+                </a:solidFill>
+              </a:rPr>
+              <a:t>Key</a:t>
+            </a:r>
+            <a:r>
+              <a:rPr b="0">
+                <a:solidFill>
+                  <a:srgbClr val="263044"/>
+                </a:solidFill>
+              </a:rPr>
+              <a:t>.</a:t>
+            </a:r>
+            <a:r>
+              <a:rPr b="0">
+                <a:solidFill>
+                  <a:srgbClr val="7651D4"/>
+                </a:solidFill>
+              </a:rPr>
+              <a:t>SourceIp</a:t>
+            </a:r>
+            <a:r>
+              <a:rPr b="0">
+                <a:solidFill>
+                  <a:srgbClr val="263044"/>
+                </a:solidFill>
+              </a:rPr>
+              <a:t>, group.</a:t>
+            </a:r>
+            <a:r>
+              <a:rPr b="0">
+                <a:solidFill>
+                  <a:srgbClr val="7651D4"/>
+                </a:solidFill>
+              </a:rPr>
+              <a:t>Count</a:t>
+            </a:r>
+            <a:r>
+              <a:rPr b="0">
+                <a:solidFill>
+                  <a:srgbClr val="263044"/>
+                </a:solidFill>
+              </a:rPr>
+              <a:t>()))</a:t>
+            </a:r>
+          </a:p>
+          <a:p xmlns:a="http://schemas.openxmlformats.org/drawingml/2006/main">
+            <a:pPr>
+              <a:lnSpc>
+                <a:spcPts val="1300"/>
+              </a:lnSpc>
+              <a:buNone/>
+              <a:defRPr sz="1050">
+                <a:solidFill>
+                  <a:srgbClr val="263044"/>
+                </a:solidFill>
+                <a:latin typeface="Consolas"/>
+                <a:ea typeface="Consolas"/>
+                <a:cs typeface="Consolas"/>
+              </a:defRPr>
+            </a:pPr>
+            <a:r>
+              <a:rPr b="0">
+                <a:solidFill>
+                  <a:srgbClr val="263044"/>
+                </a:solidFill>
+              </a:rPr>
+              <a:t>        .</a:t>
+            </a:r>
+            <a:r>
+              <a:rPr b="0">
+                <a:solidFill>
+                  <a:srgbClr val="7651D4"/>
+                </a:solidFill>
+              </a:rPr>
+              <a:t>ToArray</a:t>
+            </a:r>
+            <a:r>
+              <a:rPr b="0">
+                <a:solidFill>
+                  <a:srgbClr val="263044"/>
+                </a:solidFill>
+              </a:rPr>
+              <a:t>();</a:t>
+            </a:r>
+          </a:p>
+          <a:p xmlns:a="http://schemas.openxmlformats.org/drawingml/2006/main">
+            <a:pPr>
+              <a:lnSpc>
+                <a:spcPts val="1300"/>
+              </a:lnSpc>
               <a:buNone/>
               <a:defRPr sz="1050">
                 <a:solidFill>
@@ -8848,7 +9009,7 @@
                 <a:ea typeface="Aptos"/>
                 <a:cs typeface="Aptos"/>
               </a:rPr>
-              <a:t>Дупликати, критичност имовине и праг реакције спречавају да сваки сигнал постане нови инцидент.</a:t>
+              <a:t>Праг и временски прозор спречавају да свака неуспела пријава постане сигнал.</a:t>
             </a:r>
           </a:p>
         </p:txBody>
@@ -9005,7 +9166,7 @@
                 <a:ea typeface="Aptos"/>
                 <a:cs typeface="Aptos"/>
               </a:rPr>
-              <a:t>Одбијање је експлицитан исход са разлогом који се може тестирати и објаснити.</a:t>
+              <a:t>Сигнал носи субјекта, адресу и број покушаја, па се може проверити и објаснити.</a:t>
             </a:r>
           </a:p>
         </p:txBody>
@@ -9250,7 +9411,7 @@
                 <a:ea typeface="Aptos Display"/>
                 <a:cs typeface="Aptos Display"/>
               </a:rPr>
-              <a:t>Поновљени alert не сме да умножи рад</a:t>
+              <a:t>Испод прага нема сигнала</a:t>
             </a:r>
           </a:p>
         </p:txBody>
@@ -9311,7 +9472,7 @@
                 <a:ea typeface="Aptos"/>
                 <a:cs typeface="Aptos"/>
               </a:rPr>
-              <a:t>Тест потврђује идемпотентну обраду поновљеног сигнала и спречава дуплирање инцидента.</a:t>
+              <a:t>Тест потврђује да два неуспела покушаја не производе сигнал када је праг три.</a:t>
             </a:r>
           </a:p>
         </p:txBody>
@@ -9333,7 +9494,7 @@
         <p:spPr>
           <a:xfrm xmlns:a="http://schemas.openxmlformats.org/drawingml/2006/main">
             <a:off x="666750" y="2095500"/>
-            <a:ext cx="6858000" cy="2333625"/>
+            <a:ext cx="6858000" cy="1987050"/>
           </a:xfrm>
           <a:prstGeom xmlns:a="http://schemas.openxmlformats.org/drawingml/2006/main" prst="roundRect">
             <a:avLst>
@@ -9515,7 +9676,7 @@
           <a:p xmlns:a="http://schemas.openxmlformats.org/drawingml/2006/main">
             <a:pPr algn="r">
               <a:lnSpc>
-                <a:spcPct val="100000"/>
+                <a:spcPts val="1300"/>
               </a:lnSpc>
               <a:buNone/>
               <a:defRPr sz="975" b="0">
@@ -9542,7 +9703,7 @@
           <a:p xmlns:a="http://schemas.openxmlformats.org/drawingml/2006/main">
             <a:pPr algn="r">
               <a:lnSpc>
-                <a:spcPct val="100000"/>
+                <a:spcPts val="1300"/>
               </a:lnSpc>
               <a:buNone/>
               <a:defRPr sz="975" b="0">
@@ -9569,7 +9730,7 @@
           <a:p xmlns:a="http://schemas.openxmlformats.org/drawingml/2006/main">
             <a:pPr algn="r">
               <a:lnSpc>
-                <a:spcPct val="100000"/>
+                <a:spcPts val="1300"/>
               </a:lnSpc>
               <a:buNone/>
               <a:defRPr sz="975" b="0">
@@ -9596,7 +9757,7 @@
           <a:p xmlns:a="http://schemas.openxmlformats.org/drawingml/2006/main">
             <a:pPr algn="r">
               <a:lnSpc>
-                <a:spcPct val="100000"/>
+                <a:spcPts val="1300"/>
               </a:lnSpc>
               <a:buNone/>
               <a:defRPr sz="975" b="0">
@@ -9623,7 +9784,7 @@
           <a:p xmlns:a="http://schemas.openxmlformats.org/drawingml/2006/main">
             <a:pPr algn="r">
               <a:lnSpc>
-                <a:spcPct val="100000"/>
+                <a:spcPts val="1300"/>
               </a:lnSpc>
               <a:buNone/>
               <a:defRPr sz="975" b="0">
@@ -9650,7 +9811,7 @@
           <a:p xmlns:a="http://schemas.openxmlformats.org/drawingml/2006/main">
             <a:pPr algn="r">
               <a:lnSpc>
-                <a:spcPct val="100000"/>
+                <a:spcPts val="1300"/>
               </a:lnSpc>
               <a:buNone/>
               <a:defRPr sz="975" b="0">
@@ -9677,7 +9838,7 @@
           <a:p xmlns:a="http://schemas.openxmlformats.org/drawingml/2006/main">
             <a:pPr algn="r">
               <a:lnSpc>
-                <a:spcPct val="100000"/>
+                <a:spcPts val="1300"/>
               </a:lnSpc>
               <a:buNone/>
               <a:defRPr sz="975" b="0">
@@ -9704,7 +9865,7 @@
           <a:p xmlns:a="http://schemas.openxmlformats.org/drawingml/2006/main">
             <a:pPr algn="r">
               <a:lnSpc>
-                <a:spcPct val="100000"/>
+                <a:spcPts val="1300"/>
               </a:lnSpc>
               <a:buNone/>
               <a:defRPr sz="975" b="0">
@@ -9728,15 +9889,49 @@
               <a:t>8</a:t>
             </a:r>
           </a:p>
-          <a:p xmlns:a="http://schemas.openxmlformats.org/drawingml/2006/main">
-            <a:pPr algn="r">
-              <a:lnSpc>
-                <a:spcPct val="100000"/>
-              </a:lnSpc>
-              <a:buNone/>
-              <a:defRPr sz="975" b="0">
-                <a:solidFill>
-                  <a:srgbClr val="8792A6"/>
+        </p:txBody>
+      </p:sp>
+      <p:sp>
+        <p:nvSpPr>
+          <p:cNvPr id="12" name="Rectangle 11">
+            <a:extLst xmlns:a="http://schemas.openxmlformats.org/drawingml/2006/main">
+              <a:ext uri="{FF2B5EF4-FFF2-40B4-BE49-F238E27FC236}">
+                <a16:creationId xmlns:a16="http://schemas.microsoft.com/office/drawing/2014/main" id="{C1B45064-61A7-493D-9D7C-ED0BD82E45A3}"/>
+              </a:ext>
+            </a:extLst>
+          </p:cNvPr>
+          <p:cNvSpPr>
+            <a:spLocks xmlns:a="http://schemas.openxmlformats.org/drawingml/2006/main" noGrp="1"/>
+          </p:cNvSpPr>
+          <p:nvPr/>
+        </p:nvSpPr>
+        <p:spPr>
+          <a:xfrm xmlns:a="http://schemas.openxmlformats.org/drawingml/2006/main">
+            <a:off x="1200150" y="2571750"/>
+            <a:ext cx="6153150" cy="3028950"/>
+          </a:xfrm>
+          <a:prstGeom xmlns:a="http://schemas.openxmlformats.org/drawingml/2006/main" prst="rect">
+            <a:avLst/>
+          </a:prstGeom>
+          <a:noFill xmlns:a="http://schemas.openxmlformats.org/drawingml/2006/main"/>
+          <a:ln xmlns:a="http://schemas.openxmlformats.org/drawingml/2006/main" w="0">
+            <a:noFill/>
+          </a:ln>
+        </p:spPr>
+        <p:txBody>
+          <a:bodyPr xmlns:a="http://schemas.openxmlformats.org/drawingml/2006/main" wrap="square" lIns="0" tIns="0" rIns="0" bIns="0" anchor="t">
+            <a:normAutofit/>
+          </a:bodyPr>
+          <a:lstStyle xmlns:a="http://schemas.openxmlformats.org/drawingml/2006/main"/>
+          <a:p xmlns:a="http://schemas.openxmlformats.org/drawingml/2006/main">
+            <a:pPr>
+              <a:lnSpc>
+                <a:spcPts val="1300"/>
+              </a:lnSpc>
+              <a:buNone/>
+              <a:defRPr sz="1050">
+                <a:solidFill>
+                  <a:srgbClr val="263044"/>
                 </a:solidFill>
                 <a:latin typeface="Consolas"/>
                 <a:ea typeface="Consolas"/>
@@ -9744,26 +9939,103 @@
               </a:defRPr>
             </a:pPr>
             <a:r>
-              <a:rPr sz="975" b="0">
-                <a:solidFill>
-                  <a:srgbClr val="8792A6"/>
+              <a:rPr b="0">
+                <a:solidFill>
+                  <a:srgbClr val="263044"/>
+                </a:solidFill>
+              </a:rPr>
+              <a:t>[</a:t>
+            </a:r>
+            <a:r>
+              <a:rPr b="0">
+                <a:solidFill>
+                  <a:srgbClr val="7651D4"/>
+                </a:solidFill>
+              </a:rPr>
+              <a:t>Test</a:t>
+            </a:r>
+            <a:r>
+              <a:rPr b="0">
+                <a:solidFill>
+                  <a:srgbClr val="263044"/>
+                </a:solidFill>
+              </a:rPr>
+              <a:t>]</a:t>
+            </a:r>
+          </a:p>
+          <a:p xmlns:a="http://schemas.openxmlformats.org/drawingml/2006/main">
+            <a:pPr>
+              <a:lnSpc>
+                <a:spcPts val="1300"/>
+              </a:lnSpc>
+              <a:buNone/>
+              <a:defRPr sz="1050">
+                <a:solidFill>
+                  <a:srgbClr val="263044"/>
                 </a:solidFill>
                 <a:latin typeface="Consolas"/>
                 <a:ea typeface="Consolas"/>
                 <a:cs typeface="Consolas"/>
-              </a:rPr>
-              <a:t>9</a:t>
-            </a:r>
-          </a:p>
-          <a:p xmlns:a="http://schemas.openxmlformats.org/drawingml/2006/main">
-            <a:pPr algn="r">
-              <a:lnSpc>
-                <a:spcPct val="100000"/>
-              </a:lnSpc>
-              <a:buNone/>
-              <a:defRPr sz="975" b="0">
-                <a:solidFill>
-                  <a:srgbClr val="8792A6"/>
+              </a:defRPr>
+            </a:pPr>
+            <a:r>
+              <a:rPr b="1">
+                <a:solidFill>
+                  <a:srgbClr val="0969C3"/>
+                </a:solidFill>
+              </a:rPr>
+              <a:t>public</a:t>
+            </a:r>
+            <a:r>
+              <a:rPr b="0">
+                <a:solidFill>
+                  <a:srgbClr val="263044"/>
+                </a:solidFill>
+              </a:rPr>
+              <a:t> </a:t>
+            </a:r>
+            <a:r>
+              <a:rPr b="1">
+                <a:solidFill>
+                  <a:srgbClr val="0969C3"/>
+                </a:solidFill>
+              </a:rPr>
+              <a:t>void</a:t>
+            </a:r>
+            <a:r>
+              <a:rPr b="0">
+                <a:solidFill>
+                  <a:srgbClr val="263044"/>
+                </a:solidFill>
+              </a:rPr>
+              <a:t> </a:t>
+            </a:r>
+            <a:r>
+              <a:rPr b="0">
+                <a:solidFill>
+                  <a:srgbClr val="7651D4"/>
+                </a:solidFill>
+              </a:rPr>
+              <a:t>Detect_WhenFailuresAreBelowThreshold_RaisesNothing</a:t>
+            </a:r>
+            <a:r>
+              <a:rPr b="0">
+                <a:solidFill>
+                  <a:srgbClr val="263044"/>
+                </a:solidFill>
+              </a:rPr>
+              <a:t>()</a:t>
+            </a:r>
+          </a:p>
+          <a:p xmlns:a="http://schemas.openxmlformats.org/drawingml/2006/main">
+            <a:pPr>
+              <a:lnSpc>
+                <a:spcPts val="1300"/>
+              </a:lnSpc>
+              <a:buNone/>
+              <a:defRPr sz="1050">
+                <a:solidFill>
+                  <a:srgbClr val="263044"/>
                 </a:solidFill>
                 <a:latin typeface="Consolas"/>
                 <a:ea typeface="Consolas"/>
@@ -9771,53 +10043,75 @@
               </a:defRPr>
             </a:pPr>
             <a:r>
-              <a:rPr sz="975" b="0">
-                <a:solidFill>
-                  <a:srgbClr val="8792A6"/>
+              <a:rPr b="0">
+                <a:solidFill>
+                  <a:srgbClr val="263044"/>
+                </a:solidFill>
+              </a:rPr>
+              <a:t>{</a:t>
+            </a:r>
+          </a:p>
+          <a:p xmlns:a="http://schemas.openxmlformats.org/drawingml/2006/main">
+            <a:pPr>
+              <a:lnSpc>
+                <a:spcPts val="1300"/>
+              </a:lnSpc>
+              <a:buNone/>
+              <a:defRPr sz="1050">
+                <a:solidFill>
+                  <a:srgbClr val="263044"/>
                 </a:solidFill>
                 <a:latin typeface="Consolas"/>
                 <a:ea typeface="Consolas"/>
                 <a:cs typeface="Consolas"/>
-              </a:rPr>
-              <a:t>10</a:t>
-            </a:r>
-          </a:p>
-        </p:txBody>
-      </p:sp>
-      <p:sp>
-        <p:nvSpPr>
-          <p:cNvPr id="12" name="Rectangle 11">
-            <a:extLst xmlns:a="http://schemas.openxmlformats.org/drawingml/2006/main">
-              <a:ext uri="{FF2B5EF4-FFF2-40B4-BE49-F238E27FC236}">
-                <a16:creationId xmlns:a16="http://schemas.microsoft.com/office/drawing/2014/main" id="{C1B45064-61A7-493D-9D7C-ED0BD82E45A3}"/>
-              </a:ext>
-            </a:extLst>
-          </p:cNvPr>
-          <p:cNvSpPr>
-            <a:spLocks xmlns:a="http://schemas.openxmlformats.org/drawingml/2006/main" noGrp="1"/>
-          </p:cNvSpPr>
-          <p:nvPr/>
-        </p:nvSpPr>
-        <p:spPr>
-          <a:xfrm xmlns:a="http://schemas.openxmlformats.org/drawingml/2006/main">
-            <a:off x="1200150" y="2571750"/>
-            <a:ext cx="6153150" cy="3028950"/>
-          </a:xfrm>
-          <a:prstGeom xmlns:a="http://schemas.openxmlformats.org/drawingml/2006/main" prst="rect">
-            <a:avLst/>
-          </a:prstGeom>
-          <a:noFill xmlns:a="http://schemas.openxmlformats.org/drawingml/2006/main"/>
-          <a:ln xmlns:a="http://schemas.openxmlformats.org/drawingml/2006/main" w="0">
-            <a:noFill/>
-          </a:ln>
-        </p:spPr>
-        <p:txBody>
-          <a:bodyPr xmlns:a="http://schemas.openxmlformats.org/drawingml/2006/main" wrap="square" lIns="0" tIns="0" rIns="0" bIns="0" anchor="t">
-            <a:normAutofit/>
-          </a:bodyPr>
-          <a:lstStyle xmlns:a="http://schemas.openxmlformats.org/drawingml/2006/main"/>
+              </a:defRPr>
+            </a:pPr>
+            <a:r>
+              <a:rPr b="0">
+                <a:solidFill>
+                  <a:srgbClr val="263044"/>
+                </a:solidFill>
+              </a:rPr>
+              <a:t>    </a:t>
+            </a:r>
+            <a:r>
+              <a:rPr b="1">
+                <a:solidFill>
+                  <a:srgbClr val="0969C3"/>
+                </a:solidFill>
+              </a:rPr>
+              <a:t>var</a:t>
+            </a:r>
+            <a:r>
+              <a:rPr b="0">
+                <a:solidFill>
+                  <a:srgbClr val="263044"/>
+                </a:solidFill>
+              </a:rPr>
+              <a:t> signals = _rule.</a:t>
+            </a:r>
+            <a:r>
+              <a:rPr b="0">
+                <a:solidFill>
+                  <a:srgbClr val="7651D4"/>
+                </a:solidFill>
+              </a:rPr>
+              <a:t>Detect</a:t>
+            </a:r>
+            <a:r>
+              <a:rPr b="0">
+                <a:solidFill>
+                  <a:srgbClr val="263044"/>
+                </a:solidFill>
+              </a:rPr>
+              <a:t>(</a:t>
+            </a:r>
+          </a:p>
           <a:p xmlns:a="http://schemas.openxmlformats.org/drawingml/2006/main">
             <a:pPr>
+              <a:lnSpc>
+                <a:spcPts val="1300"/>
+              </a:lnSpc>
               <a:buNone/>
               <a:defRPr sz="1050">
                 <a:solidFill>
@@ -9834,7 +10128,7 @@
                   <a:srgbClr val="263044"/>
                 </a:solidFill>
               </a:rPr>
-              <a:t>[</a:t>
+              <a:t>        </a:t>
             </a:r>
             <a:r>
               <a:rPr b="0">
@@ -9842,7 +10136,7 @@
                   <a:srgbClr val="7651D4"/>
                 </a:solidFill>
               </a:rPr>
-              <a:t>Fact</a:t>
+              <a:t>Attempts</a:t>
             </a:r>
             <a:r>
               <a:rPr b="0">
@@ -9850,11 +10144,110 @@
                   <a:srgbClr val="263044"/>
                 </a:solidFill>
               </a:rPr>
-              <a:t>]</a:t>
+              <a:t>.</a:t>
+            </a:r>
+            <a:r>
+              <a:rPr b="0">
+                <a:solidFill>
+                  <a:srgbClr val="7651D4"/>
+                </a:solidFill>
+              </a:rPr>
+              <a:t>Failures</a:t>
+            </a:r>
+            <a:r>
+              <a:rPr b="0">
+                <a:solidFill>
+                  <a:srgbClr val="263044"/>
+                </a:solidFill>
+              </a:rPr>
+              <a:t>(</a:t>
+            </a:r>
+            <a:r>
+              <a:rPr b="0">
+                <a:solidFill>
+                  <a:srgbClr val="B45309"/>
+                </a:solidFill>
+              </a:rPr>
+              <a:t>"ana"</a:t>
+            </a:r>
+            <a:r>
+              <a:rPr b="0">
+                <a:solidFill>
+                  <a:srgbClr val="263044"/>
+                </a:solidFill>
+              </a:rPr>
+              <a:t>, </a:t>
+            </a:r>
+            <a:r>
+              <a:rPr b="0">
+                <a:solidFill>
+                  <a:srgbClr val="B45309"/>
+                </a:solidFill>
+              </a:rPr>
+              <a:t>"203.0.113.10"</a:t>
+            </a:r>
+            <a:r>
+              <a:rPr b="0">
+                <a:solidFill>
+                  <a:srgbClr val="263044"/>
+                </a:solidFill>
+              </a:rPr>
+              <a:t>, </a:t>
+            </a:r>
+            <a:r>
+              <a:rPr b="0">
+                <a:solidFill>
+                  <a:srgbClr val="B86A09"/>
+                </a:solidFill>
+              </a:rPr>
+              <a:t>2</a:t>
+            </a:r>
+            <a:r>
+              <a:rPr b="0">
+                <a:solidFill>
+                  <a:srgbClr val="263044"/>
+                </a:solidFill>
+              </a:rPr>
+              <a:t>, </a:t>
+            </a:r>
+            <a:r>
+              <a:rPr b="0">
+                <a:solidFill>
+                  <a:srgbClr val="7651D4"/>
+                </a:solidFill>
+              </a:rPr>
+              <a:t>Now</a:t>
+            </a:r>
+            <a:r>
+              <a:rPr b="0">
+                <a:solidFill>
+                  <a:srgbClr val="263044"/>
+                </a:solidFill>
+              </a:rPr>
+              <a:t>), </a:t>
+            </a:r>
+            <a:r>
+              <a:rPr b="0">
+                <a:solidFill>
+                  <a:srgbClr val="7651D4"/>
+                </a:solidFill>
+              </a:rPr>
+              <a:t>Now</a:t>
+            </a:r>
+            <a:r>
+              <a:rPr b="0">
+                <a:solidFill>
+                  <a:srgbClr val="263044"/>
+                </a:solidFill>
+              </a:rPr>
+              <a:t>);</a:t>
             </a:r>
           </a:p>
           <a:p xmlns:a="http://schemas.openxmlformats.org/drawingml/2006/main">
             <a:pPr>
+              <a:lnSpc>
+                <a:spcPts val="1300"/>
+              </a:lnSpc>
               <a:buNone/>
               <a:defRPr sz="1050">
                 <a:solidFill>
@@ -9866,14 +10259,6 @@
               </a:defRPr>
             </a:pPr>
             <a:r>
-              <a:rPr b="1">
-                <a:solidFill>
-                  <a:srgbClr val="0969C3"/>
-                </a:solidFill>
-              </a:rPr>
-              <a:t>public</a:t>
-            </a:r>
-            <a:r>
               <a:rPr b="0">
                 <a:solidFill>
                   <a:srgbClr val="263044"/>
@@ -9881,41 +10266,12 @@
               </a:rPr>
               <a:t> </a:t>
             </a:r>
-            <a:r>
-              <a:rPr b="1">
-                <a:solidFill>
-                  <a:srgbClr val="0969C3"/>
-                </a:solidFill>
-              </a:rPr>
-              <a:t>void</a:t>
-            </a:r>
-            <a:r>
-              <a:rPr b="0">
-                <a:solidFill>
-                  <a:srgbClr val="263044"/>
-                </a:solidFill>
-              </a:rPr>
-              <a:t> </a:t>
-            </a:r>
-            <a:r>
-              <a:rPr b="0">
-                <a:solidFill>
-                  <a:srgbClr val="7651D4"/>
-                </a:solidFill>
-              </a:rPr>
-              <a:t>Duplicate_alert_does_not_create_second_incident</a:t>
-            </a:r>
-            <a:r>
-              <a:rPr b="0">
-                <a:solidFill>
-                  <a:srgbClr val="263044"/>
-                </a:solidFill>
-              </a:rPr>
-              <a:t>()</a:t>
-            </a:r>
           </a:p>
           <a:p xmlns:a="http://schemas.openxmlformats.org/drawingml/2006/main">
             <a:pPr>
+              <a:lnSpc>
+                <a:spcPts val="1300"/>
+              </a:lnSpc>
               <a:buNone/>
               <a:defRPr sz="1050">
                 <a:solidFill>
@@ -9932,403 +10288,78 @@
                   <a:srgbClr val="263044"/>
                 </a:solidFill>
               </a:rPr>
-              <a:t>{</a:t>
+              <a:t>    </a:t>
+            </a:r>
+            <a:r>
+              <a:rPr b="0">
+                <a:solidFill>
+                  <a:srgbClr val="7651D4"/>
+                </a:solidFill>
+              </a:rPr>
+              <a:t>Assert</a:t>
+            </a:r>
+            <a:r>
+              <a:rPr b="0">
+                <a:solidFill>
+                  <a:srgbClr val="263044"/>
+                </a:solidFill>
+              </a:rPr>
+              <a:t>.</a:t>
+            </a:r>
+            <a:r>
+              <a:rPr b="0">
+                <a:solidFill>
+                  <a:srgbClr val="7651D4"/>
+                </a:solidFill>
+              </a:rPr>
+              <a:t>That</a:t>
+            </a:r>
+            <a:r>
+              <a:rPr b="0">
+                <a:solidFill>
+                  <a:srgbClr val="263044"/>
+                </a:solidFill>
+              </a:rPr>
+              <a:t>(signals, </a:t>
+            </a:r>
+            <a:r>
+              <a:rPr b="0">
+                <a:solidFill>
+                  <a:srgbClr val="7651D4"/>
+                </a:solidFill>
+              </a:rPr>
+              <a:t>Is</a:t>
+            </a:r>
+            <a:r>
+              <a:rPr b="0">
+                <a:solidFill>
+                  <a:srgbClr val="263044"/>
+                </a:solidFill>
+              </a:rPr>
+              <a:t>.</a:t>
+            </a:r>
+            <a:r>
+              <a:rPr b="0">
+                <a:solidFill>
+                  <a:srgbClr val="7651D4"/>
+                </a:solidFill>
+              </a:rPr>
+              <a:t>Empty</a:t>
+            </a:r>
+            <a:r>
+              <a:rPr b="0">
+                <a:solidFill>
+                  <a:srgbClr val="263044"/>
+                </a:solidFill>
+              </a:rPr>
+              <a:t>);</a:t>
             </a:r>
           </a:p>
           <a:p xmlns:a="http://schemas.openxmlformats.org/drawingml/2006/main">
             <a:pPr>
-              <a:buNone/>
-              <a:defRPr sz="1050">
-                <a:solidFill>
-                  <a:srgbClr val="263044"/>
-                </a:solidFill>
-                <a:latin typeface="Consolas"/>
-                <a:ea typeface="Consolas"/>
-                <a:cs typeface="Consolas"/>
-              </a:defRPr>
-            </a:pPr>
-            <a:r>
-              <a:rPr b="0">
-                <a:solidFill>
-                  <a:srgbClr val="263044"/>
-                </a:solidFill>
-              </a:rPr>
-              <a:t>    alerts.</a:t>
-            </a:r>
-            <a:r>
-              <a:rPr b="0">
-                <a:solidFill>
-                  <a:srgbClr val="7651D4"/>
-                </a:solidFill>
-              </a:rPr>
-              <a:t>Store</a:t>
-            </a:r>
-            <a:r>
-              <a:rPr b="0">
-                <a:solidFill>
-                  <a:srgbClr val="263044"/>
-                </a:solidFill>
-              </a:rPr>
-              <a:t>(</a:t>
-            </a:r>
-            <a:r>
-              <a:rPr b="0">
-                <a:solidFill>
-                  <a:srgbClr val="7651D4"/>
-                </a:solidFill>
-              </a:rPr>
-              <a:t>Alert</a:t>
-            </a:r>
-            <a:r>
-              <a:rPr b="0">
-                <a:solidFill>
-                  <a:srgbClr val="263044"/>
-                </a:solidFill>
-              </a:rPr>
-              <a:t>.</a:t>
-            </a:r>
-            <a:r>
-              <a:rPr b="0">
-                <a:solidFill>
-                  <a:srgbClr val="7651D4"/>
-                </a:solidFill>
-              </a:rPr>
-              <a:t>WithFingerprint</a:t>
-            </a:r>
-            <a:r>
-              <a:rPr b="0">
-                <a:solidFill>
-                  <a:srgbClr val="263044"/>
-                </a:solidFill>
-              </a:rPr>
-              <a:t>(</a:t>
-            </a:r>
-            <a:r>
-              <a:rPr b="0">
-                <a:solidFill>
-                  <a:srgbClr val="B45309"/>
-                </a:solidFill>
-              </a:rPr>
-              <a:t>"login-spike:u-3"</a:t>
-            </a:r>
-            <a:r>
-              <a:rPr b="0">
-                <a:solidFill>
-                  <a:srgbClr val="263044"/>
-                </a:solidFill>
-              </a:rPr>
-              <a:t>));</a:t>
-            </a:r>
-          </a:p>
-          <a:p xmlns:a="http://schemas.openxmlformats.org/drawingml/2006/main">
-            <a:pPr>
-              <a:buNone/>
-              <a:defRPr sz="1050">
-                <a:solidFill>
-                  <a:srgbClr val="263044"/>
-                </a:solidFill>
-                <a:latin typeface="Consolas"/>
-                <a:ea typeface="Consolas"/>
-                <a:cs typeface="Consolas"/>
-              </a:defRPr>
-            </a:pPr>
-            <a:endParaRPr b="0">
-              <a:solidFill>
-                <a:srgbClr val="263044"/>
-              </a:solidFill>
-            </a:endParaRPr>
-          </a:p>
-          <a:p xmlns:a="http://schemas.openxmlformats.org/drawingml/2006/main">
-            <a:pPr>
-              <a:buNone/>
-              <a:defRPr sz="1050">
-                <a:solidFill>
-                  <a:srgbClr val="263044"/>
-                </a:solidFill>
-                <a:latin typeface="Consolas"/>
-                <a:ea typeface="Consolas"/>
-                <a:cs typeface="Consolas"/>
-              </a:defRPr>
-            </a:pPr>
-            <a:r>
-              <a:rPr b="0">
-                <a:solidFill>
-                  <a:srgbClr val="263044"/>
-                </a:solidFill>
-              </a:rPr>
-              <a:t>    </a:t>
-            </a:r>
-            <a:r>
-              <a:rPr b="1">
-                <a:solidFill>
-                  <a:srgbClr val="0969C3"/>
-                </a:solidFill>
-              </a:rPr>
-              <a:t>var</a:t>
-            </a:r>
-            <a:r>
-              <a:rPr b="0">
-                <a:solidFill>
-                  <a:srgbClr val="263044"/>
-                </a:solidFill>
-              </a:rPr>
-              <a:t> result = triage.</a:t>
-            </a:r>
-            <a:r>
-              <a:rPr b="0">
-                <a:solidFill>
-                  <a:srgbClr val="7651D4"/>
-                </a:solidFill>
-              </a:rPr>
-              <a:t>Handle</a:t>
-            </a:r>
-            <a:r>
-              <a:rPr b="0">
-                <a:solidFill>
-                  <a:srgbClr val="263044"/>
-                </a:solidFill>
-              </a:rPr>
-              <a:t>(</a:t>
-            </a:r>
-            <a:r>
-              <a:rPr b="0">
-                <a:solidFill>
-                  <a:srgbClr val="7651D4"/>
-                </a:solidFill>
-              </a:rPr>
-              <a:t>Alert</a:t>
-            </a:r>
-            <a:r>
-              <a:rPr b="0">
-                <a:solidFill>
-                  <a:srgbClr val="263044"/>
-                </a:solidFill>
-              </a:rPr>
-              <a:t>.</a:t>
-            </a:r>
-            <a:r>
-              <a:rPr b="0">
-                <a:solidFill>
-                  <a:srgbClr val="7651D4"/>
-                </a:solidFill>
-              </a:rPr>
-              <a:t>WithFingerprint</a:t>
-            </a:r>
-            <a:r>
-              <a:rPr b="0">
-                <a:solidFill>
-                  <a:srgbClr val="263044"/>
-                </a:solidFill>
-              </a:rPr>
-              <a:t>(</a:t>
-            </a:r>
-            <a:r>
-              <a:rPr b="0">
-                <a:solidFill>
-                  <a:srgbClr val="B45309"/>
-                </a:solidFill>
-              </a:rPr>
-              <a:t>"login-spike:u-3"</a:t>
-            </a:r>
-            <a:r>
-              <a:rPr b="0">
-                <a:solidFill>
-                  <a:srgbClr val="263044"/>
-                </a:solidFill>
-              </a:rPr>
-              <a:t>));</a:t>
-            </a:r>
-          </a:p>
-          <a:p xmlns:a="http://schemas.openxmlformats.org/drawingml/2006/main">
-            <a:pPr>
-              <a:buNone/>
-              <a:defRPr sz="1050">
-                <a:solidFill>
-                  <a:srgbClr val="263044"/>
-                </a:solidFill>
-                <a:latin typeface="Consolas"/>
-                <a:ea typeface="Consolas"/>
-                <a:cs typeface="Consolas"/>
-              </a:defRPr>
-            </a:pPr>
-            <a:endParaRPr b="0">
-              <a:solidFill>
-                <a:srgbClr val="263044"/>
-              </a:solidFill>
-            </a:endParaRPr>
-          </a:p>
-          <a:p xmlns:a="http://schemas.openxmlformats.org/drawingml/2006/main">
-            <a:pPr>
-              <a:buNone/>
-              <a:defRPr sz="1050">
-                <a:solidFill>
-                  <a:srgbClr val="263044"/>
-                </a:solidFill>
-                <a:latin typeface="Consolas"/>
-                <a:ea typeface="Consolas"/>
-                <a:cs typeface="Consolas"/>
-              </a:defRPr>
-            </a:pPr>
-            <a:r>
-              <a:rPr b="0">
-                <a:solidFill>
-                  <a:srgbClr val="263044"/>
-                </a:solidFill>
-              </a:rPr>
-              <a:t>    result.</a:t>
-            </a:r>
-            <a:r>
-              <a:rPr b="0">
-                <a:solidFill>
-                  <a:srgbClr val="7651D4"/>
-                </a:solidFill>
-              </a:rPr>
-              <a:t>Action</a:t>
-            </a:r>
-            <a:r>
-              <a:rPr b="0">
-                <a:solidFill>
-                  <a:srgbClr val="263044"/>
-                </a:solidFill>
-              </a:rPr>
-              <a:t>.</a:t>
-            </a:r>
-            <a:r>
-              <a:rPr b="0">
-                <a:solidFill>
-                  <a:srgbClr val="7651D4"/>
-                </a:solidFill>
-              </a:rPr>
-              <a:t>Should</a:t>
-            </a:r>
-            <a:r>
-              <a:rPr b="0">
-                <a:solidFill>
-                  <a:srgbClr val="263044"/>
-                </a:solidFill>
-              </a:rPr>
-              <a:t>().</a:t>
-            </a:r>
-            <a:r>
-              <a:rPr b="0">
-                <a:solidFill>
-                  <a:srgbClr val="7651D4"/>
-                </a:solidFill>
-              </a:rPr>
-              <a:t>Be</a:t>
-            </a:r>
-            <a:r>
-              <a:rPr b="0">
-                <a:solidFill>
-                  <a:srgbClr val="263044"/>
-                </a:solidFill>
-              </a:rPr>
-              <a:t>(</a:t>
-            </a:r>
-            <a:r>
-              <a:rPr b="0">
-                <a:solidFill>
-                  <a:srgbClr val="B45309"/>
-                </a:solidFill>
-              </a:rPr>
-              <a:t>"merge"</a:t>
-            </a:r>
-            <a:r>
-              <a:rPr b="0">
-                <a:solidFill>
-                  <a:srgbClr val="263044"/>
-                </a:solidFill>
-              </a:rPr>
-              <a:t>);</a:t>
-            </a:r>
-          </a:p>
-          <a:p xmlns:a="http://schemas.openxmlformats.org/drawingml/2006/main">
-            <a:pPr>
-              <a:buNone/>
-              <a:defRPr sz="1050">
-                <a:solidFill>
-                  <a:srgbClr val="263044"/>
-                </a:solidFill>
-                <a:latin typeface="Consolas"/>
-                <a:ea typeface="Consolas"/>
-                <a:cs typeface="Consolas"/>
-              </a:defRPr>
-            </a:pPr>
-            <a:r>
-              <a:rPr b="0">
-                <a:solidFill>
-                  <a:srgbClr val="263044"/>
-                </a:solidFill>
-              </a:rPr>
-              <a:t>    incidents.</a:t>
-            </a:r>
-            <a:r>
-              <a:rPr b="0">
-                <a:solidFill>
-                  <a:srgbClr val="7651D4"/>
-                </a:solidFill>
-              </a:rPr>
-              <a:t>Created</a:t>
-            </a:r>
-            <a:r>
-              <a:rPr b="0">
-                <a:solidFill>
-                  <a:srgbClr val="263044"/>
-                </a:solidFill>
-              </a:rPr>
-              <a:t>.</a:t>
-            </a:r>
-            <a:r>
-              <a:rPr b="0">
-                <a:solidFill>
-                  <a:srgbClr val="7651D4"/>
-                </a:solidFill>
-              </a:rPr>
-              <a:t>Should</a:t>
-            </a:r>
-            <a:r>
-              <a:rPr b="0">
-                <a:solidFill>
-                  <a:srgbClr val="263044"/>
-                </a:solidFill>
-              </a:rPr>
-              <a:t>().</a:t>
-            </a:r>
-            <a:r>
-              <a:rPr b="0">
-                <a:solidFill>
-                  <a:srgbClr val="7651D4"/>
-                </a:solidFill>
-              </a:rPr>
-              <a:t>Be</a:t>
-            </a:r>
-            <a:r>
-              <a:rPr b="0">
-                <a:solidFill>
-                  <a:srgbClr val="263044"/>
-                </a:solidFill>
-              </a:rPr>
-              <a:t>(</a:t>
-            </a:r>
-            <a:r>
-              <a:rPr b="0">
-                <a:solidFill>
-                  <a:srgbClr val="B86A09"/>
-                </a:solidFill>
-              </a:rPr>
-              <a:t>0</a:t>
-            </a:r>
-            <a:r>
-              <a:rPr b="0">
-                <a:solidFill>
-                  <a:srgbClr val="263044"/>
-                </a:solidFill>
-              </a:rPr>
-              <a:t>);</a:t>
-            </a:r>
-          </a:p>
-          <a:p xmlns:a="http://schemas.openxmlformats.org/drawingml/2006/main">
-            <a:pPr>
+              <a:lnSpc>
+                <a:spcPts val="1300"/>
+              </a:lnSpc>
               <a:buNone/>
               <a:defRPr sz="1050">
                 <a:solidFill>
@@ -10502,7 +10533,7 @@
                 <a:ea typeface="Aptos"/>
                 <a:cs typeface="Aptos"/>
               </a:rPr>
-              <a:t>Негативан сценарио проверава идемпотентност и чува једну временску линију догађаја.</a:t>
+              <a:t>Негативан сценарио проверава да правило не подиже узбуну пре прага.</a:t>
             </a:r>
           </a:p>
         </p:txBody>
@@ -10659,7 +10690,7 @@
                 <a:ea typeface="Aptos"/>
                 <a:cs typeface="Aptos"/>
               </a:rPr>
-              <a:t>Тест мења једну чињеницу и очекује јасан, стабилан разлог одбијања.</a:t>
+              <a:t>Тест мења само број покушаја и очекује празну листу сигнала.</a:t>
             </a:r>
           </a:p>
         </p:txBody>
@@ -11169,7 +11200,7 @@
           <a:p xmlns:a="http://schemas.openxmlformats.org/drawingml/2006/main">
             <a:pPr algn="r">
               <a:lnSpc>
-                <a:spcPct val="100000"/>
+                <a:spcPts val="1300"/>
               </a:lnSpc>
               <a:buNone/>
               <a:defRPr sz="1050" b="0">
@@ -11196,7 +11227,7 @@
           <a:p xmlns:a="http://schemas.openxmlformats.org/drawingml/2006/main">
             <a:pPr algn="r">
               <a:lnSpc>
-                <a:spcPct val="100000"/>
+                <a:spcPts val="1300"/>
               </a:lnSpc>
               <a:buNone/>
               <a:defRPr sz="1050" b="0">
@@ -11223,7 +11254,7 @@
           <a:p xmlns:a="http://schemas.openxmlformats.org/drawingml/2006/main">
             <a:pPr algn="r">
               <a:lnSpc>
-                <a:spcPct val="100000"/>
+                <a:spcPts val="1300"/>
               </a:lnSpc>
               <a:buNone/>
               <a:defRPr sz="1050" b="0">
@@ -11250,7 +11281,7 @@
           <a:p xmlns:a="http://schemas.openxmlformats.org/drawingml/2006/main">
             <a:pPr algn="r">
               <a:lnSpc>
-                <a:spcPct val="100000"/>
+                <a:spcPts val="1300"/>
               </a:lnSpc>
               <a:buNone/>
               <a:defRPr sz="1050" b="0">
@@ -11277,7 +11308,7 @@
           <a:p xmlns:a="http://schemas.openxmlformats.org/drawingml/2006/main">
             <a:pPr algn="r">
               <a:lnSpc>
-                <a:spcPct val="100000"/>
+                <a:spcPts val="1300"/>
               </a:lnSpc>
               <a:buNone/>
               <a:defRPr sz="1050" b="0">
@@ -11304,7 +11335,7 @@
           <a:p xmlns:a="http://schemas.openxmlformats.org/drawingml/2006/main">
             <a:pPr algn="r">
               <a:lnSpc>
-                <a:spcPct val="100000"/>
+                <a:spcPts val="1300"/>
               </a:lnSpc>
               <a:buNone/>
               <a:defRPr sz="1050" b="0">
@@ -11331,7 +11362,7 @@
           <a:p xmlns:a="http://schemas.openxmlformats.org/drawingml/2006/main">
             <a:pPr algn="r">
               <a:lnSpc>
-                <a:spcPct val="100000"/>
+                <a:spcPts val="1300"/>
               </a:lnSpc>
               <a:buNone/>
               <a:defRPr sz="1050" b="0">
@@ -11358,7 +11389,7 @@
           <a:p xmlns:a="http://schemas.openxmlformats.org/drawingml/2006/main">
             <a:pPr algn="r">
               <a:lnSpc>
-                <a:spcPct val="100000"/>
+                <a:spcPts val="1300"/>
               </a:lnSpc>
               <a:buNone/>
               <a:defRPr sz="1050" b="0">
@@ -11418,6 +11449,9 @@
           <a:lstStyle xmlns:a="http://schemas.openxmlformats.org/drawingml/2006/main"/>
           <a:p xmlns:a="http://schemas.openxmlformats.org/drawingml/2006/main">
             <a:pPr>
+              <a:lnSpc>
+                <a:spcPts val="1300"/>
+              </a:lnSpc>
               <a:buNone/>
               <a:defRPr sz="1125">
                 <a:solidFill>
@@ -11439,6 +11473,9 @@
           </a:p>
           <a:p xmlns:a="http://schemas.openxmlformats.org/drawingml/2006/main">
             <a:pPr>
+              <a:lnSpc>
+                <a:spcPts val="1300"/>
+              </a:lnSpc>
               <a:buNone/>
               <a:defRPr sz="1125">
                 <a:solidFill>
@@ -11492,6 +11529,9 @@
           </a:p>
           <a:p xmlns:a="http://schemas.openxmlformats.org/drawingml/2006/main">
             <a:pPr>
+              <a:lnSpc>
+                <a:spcPts val="1300"/>
+              </a:lnSpc>
               <a:buNone/>
               <a:defRPr sz="1125">
                 <a:solidFill>
@@ -11545,6 +11585,9 @@
           </a:p>
           <a:p xmlns:a="http://schemas.openxmlformats.org/drawingml/2006/main">
             <a:pPr>
+              <a:lnSpc>
+                <a:spcPts val="1300"/>
+              </a:lnSpc>
               <a:buNone/>
               <a:defRPr sz="1125">
                 <a:solidFill>
@@ -11598,6 +11641,9 @@
           </a:p>
           <a:p xmlns:a="http://schemas.openxmlformats.org/drawingml/2006/main">
             <a:pPr>
+              <a:lnSpc>
+                <a:spcPts val="1300"/>
+              </a:lnSpc>
               <a:buNone/>
               <a:defRPr sz="1125">
                 <a:solidFill>
@@ -11651,6 +11697,9 @@
           </a:p>
           <a:p xmlns:a="http://schemas.openxmlformats.org/drawingml/2006/main">
             <a:pPr>
+              <a:lnSpc>
+                <a:spcPts val="1300"/>
+              </a:lnSpc>
               <a:buNone/>
               <a:defRPr sz="1125">
                 <a:solidFill>
@@ -11704,6 +11753,9 @@
           </a:p>
           <a:p xmlns:a="http://schemas.openxmlformats.org/drawingml/2006/main">
             <a:pPr>
+              <a:lnSpc>
+                <a:spcPts val="1300"/>
+              </a:lnSpc>
               <a:buNone/>
               <a:defRPr sz="1125">
                 <a:solidFill>
@@ -11749,6 +11801,9 @@
           </a:p>
           <a:p xmlns:a="http://schemas.openxmlformats.org/drawingml/2006/main">
             <a:pPr>
+              <a:lnSpc>
+                <a:spcPts val="1300"/>
+              </a:lnSpc>
               <a:buNone/>
               <a:defRPr sz="1125">
                 <a:solidFill>
@@ -20275,7 +20330,7 @@
                 <a:ea typeface="Aptos"/>
                 <a:cs typeface="Aptos"/>
               </a:rPr>
-              <a:t>Праг детекције треба да има смисао и разлог, не само произвољну бројку.</a:t>
+              <a:t>Сигнал настаје када догађаји пређу праг унутар одређеног временског прозора.</a:t>
             </a:r>
           </a:p>
         </p:txBody>
@@ -20499,7 +20554,7 @@
                 <a:ea typeface="Aptos"/>
                 <a:cs typeface="Aptos"/>
               </a:rPr>
-              <a:t>Детекција треба да опише образац који је вредан пажње, а не да сваку грешку прогласи инцидентом.</a:t>
+              <a:t>Појединачан неуспео покушај није сигнал, а успешне пријаве се не броје.</a:t>
             </a:r>
           </a:p>
         </p:txBody>
@@ -20723,7 +20778,7 @@
                 <a:ea typeface="Aptos"/>
                 <a:cs typeface="Aptos"/>
               </a:rPr>
-              <a:t>Праг се бира према нормалном понашању система, а не према случајном броју.</a:t>
+              <a:t>Сигнал носи контекст: назив правила, субјекта, изворну адресу и број покушаја.</a:t>
             </a:r>
           </a:p>
         </p:txBody>
@@ -21034,7 +21089,7 @@
                 <a:ea typeface="Aptos"/>
                 <a:cs typeface="Aptos"/>
               </a:rPr>
-              <a:t>Који догађај би у вашем систему био користан сигнал, али не и довољан доказ инцидента? Који контекст недостаје?</a:t>
+              <a:t>Који праг и који временски прозор раздвајају уобичајену грешку од сигнала у вашем систему?</a:t>
             </a:r>
           </a:p>
         </p:txBody>
@@ -21503,7 +21558,7 @@
                 <a:ea typeface="Aptos"/>
                 <a:cs typeface="Aptos"/>
               </a:rPr>
-              <a:t>Затварање упозорења чува образложење, јер је то знање за следећи сличан случај.</a:t>
+              <a:t>Triage додаје сигналу контекст: коју имовину погађа и колики је могући утицај.</a:t>
             </a:r>
           </a:p>
         </p:txBody>
@@ -21727,7 +21782,7 @@
                 <a:ea typeface="Aptos"/>
                 <a:cs typeface="Aptos"/>
               </a:rPr>
-              <a:t>Triage чува одлуку и образложење, укључујући разлог због ког је упозорење затворено.</a:t>
+              <a:t>Озбиљност се одређује правилом, а не утиском особе која је на дужности.</a:t>
             </a:r>
           </a:p>
         </p:txBody>
@@ -21951,7 +22006,7 @@
                 <a:ea typeface="Aptos"/>
                 <a:cs typeface="Aptos"/>
               </a:rPr>
-              <a:t>Упозорење има озбиљност, власника и рок до ког се мора погледати.</a:t>
+              <a:t>Одлука се образлаже, укључујући и разлог због ког је упозорење затворено.</a:t>
             </a:r>
           </a:p>
         </p:txBody>
@@ -22262,7 +22317,7 @@
                 <a:ea typeface="Aptos"/>
                 <a:cs typeface="Aptos"/>
               </a:rPr>
-              <a:t>Који догађај би у вашем систему био користан сигнал, али не и довољан доказ инцидента? Који контекст недостаје?</a:t>
+              <a:t>Који податак о имовини мења озбиљност истог сигнала?</a:t>
             </a:r>
           </a:p>
         </p:txBody>
@@ -22731,7 +22786,7 @@
                 <a:ea typeface="Aptos"/>
                 <a:cs typeface="Aptos"/>
               </a:rPr>
-              <a:t>Рањивост се сматра решеном након провере да је ризик смањен на прихватљив ниво.</a:t>
+              <a:t>Инцидент настаје из сигнала који је прошао triage и има власника реакције.</a:t>
             </a:r>
           </a:p>
         </p:txBody>
@@ -22955,7 +23010,7 @@
                 <a:ea typeface="Aptos"/>
                 <a:cs typeface="Aptos"/>
               </a:rPr>
-              <a:t>Затварање рањивости тражи доказ да је изложеност уклоњена или прихваћена уз видљив преостали ризик.</a:t>
+              <a:t>Поновљени сигнал се придружује постојећем инциденту уместо да отвара нови.</a:t>
             </a:r>
           </a:p>
         </p:txBody>
@@ -23179,7 +23234,7 @@
                 <a:ea typeface="Aptos"/>
                 <a:cs typeface="Aptos"/>
               </a:rPr>
-              <a:t>Инцидент се отвара када контекст покаже стварни утицај или вероватну злоупотребу.</a:t>
+              <a:t>Временска линија инцидента чува сигнале, одлуке и предузете радње.</a:t>
             </a:r>
           </a:p>
         </p:txBody>
@@ -23490,7 +23545,7 @@
                 <a:ea typeface="Aptos"/>
                 <a:cs typeface="Aptos"/>
               </a:rPr>
-              <a:t>Који догађај би у вашем систему био користан сигнал, али не и довољан доказ инцидента? Који контекст недостаје?</a:t>
+              <a:t>Ко у вашој целини преузима инцидент и по ком запису се види шта је урађено?</a:t>
             </a:r>
           </a:p>
         </p:txBody>
@@ -23959,7 +24014,7 @@
                 <a:ea typeface="Aptos"/>
                 <a:cs typeface="Aptos"/>
               </a:rPr>
-              <a:t>Праг се бира према нормалном понашању система, а не према случајном броју.</a:t>
+              <a:t>Постинцидентна анализа одваја чињенице од претпоставки насталих под притиском.</a:t>
             </a:r>
           </a:p>
         </p:txBody>
@@ -24183,7 +24238,7 @@
                 <a:ea typeface="Aptos"/>
                 <a:cs typeface="Aptos"/>
               </a:rPr>
-              <a:t>Упозорење има озбиљност, власника и рок до ког се мора погледати.</a:t>
+              <a:t>Корективна акција има власника и проверљив завршетак.</a:t>
             </a:r>
           </a:p>
         </p:txBody>
@@ -24407,7 +24462,7 @@
                 <a:ea typeface="Aptos"/>
                 <a:cs typeface="Aptos"/>
               </a:rPr>
-              <a:t>Инцидент се отвара када контекст покаже стварни утицај или вероватну злоупотребу.</a:t>
+              <a:t>Сценарио инцидента постаје тест, да се исто знање не изгуби.</a:t>
             </a:r>
           </a:p>
         </p:txBody>
@@ -24718,7 +24773,7 @@
                 <a:ea typeface="Aptos"/>
                 <a:cs typeface="Aptos"/>
               </a:rPr>
-              <a:t>Који догађај би у вашем систему био користан сигнал, али не и довољан доказ инцидента? Који контекст недостаје?</a:t>
+              <a:t>Који тест бисте додали после инцидента да се исти пропуст не понови?</a:t>
             </a:r>
           </a:p>
         </p:txBody>
